--- a/docs/THUYET_TRINH_R05-K15.pptx
+++ b/docs/THUYET_TRINH_R05-K15.pptx
@@ -121,19 +121,19 @@
   <p:extLst>
     <p:ext uri="{521415D9-36F7-43E2-AB2F-B90AF26B5E84}">
       <p14:sectionLst xmlns:p14="http://schemas.microsoft.com/office/powerpoint/2010/main">
-        <p14:section name="Đề tài và hệ thống" id="{37768934-2d1b-91c3-37e4-7d60a411327f}">
+        <p14:section name="Đề tài và hệ thống" id="{9e4bd971-f0ea-3b7e-7617-1ddc98b44042}">
           <p14:sldIdLst>
             <p14:sldId id="256"/>
             <p14:sldId id="257"/>
           </p14:sldIdLst>
         </p14:section>
-        <p14:section name="Kiến trúc và giả thuyết" id="{658e48f6-a7cc-2646-ecd0-1108f6ce931d}">
+        <p14:section name="Kiến trúc và giả thuyết" id="{38338113-286d-0c8c-de36-5600e00ecd0d}">
           <p14:sldIdLst>
             <p14:sldId id="258"/>
             <p14:sldId id="259"/>
           </p14:sldIdLst>
         </p14:section>
-        <p14:section name="Môi trường, phương pháp, harness" id="{4af4c24d-023c-0644-544e-270a654f91b0}">
+        <p14:section name="Môi trường, phương pháp, harness" id="{0a62078f-89e4-402e-e4b5-9092244459af}">
           <p14:sldIdLst>
             <p14:sldId id="260"/>
             <p14:sldId id="261"/>
@@ -141,7 +141,7 @@
             <p14:sldId id="263"/>
           </p14:sldIdLst>
         </p14:section>
-        <p14:section name="Kết quả và lỗi" id="{be31eb9f-8f66-db5b-a301-09f8aa065803}">
+        <p14:section name="Kết quả và lỗi" id="{b3c490d7-cd6c-6e0b-b90c-4be0964582d1}">
           <p14:sldIdLst>
             <p14:sldId id="264"/>
             <p14:sldId id="265"/>
@@ -150,7 +150,7 @@
             <p14:sldId id="268"/>
           </p14:sldIdLst>
         </p14:section>
-        <p14:section name="Khắc phục và kết luận" id="{21f4d05f-d24c-98ee-068f-a701b082551a}">
+        <p14:section name="Khắc phục và kết luận" id="{1ea3d39c-328d-c4c8-15a9-ba0766b8b49f}">
           <p14:sldIdLst>
             <p14:sldId id="269"/>
             <p14:sldId id="270"/>
@@ -3029,8 +3029,8 @@
         </p:nvSpPr>
         <p:spPr>
           <a:xfrm>
-            <a:off x="7498080" y="5577840"/>
-            <a:ext cx="4023360" cy="731520"/>
+            <a:off x="6949440" y="5029200"/>
+            <a:ext cx="4599432" cy="1325880"/>
           </a:xfrm>
           <a:prstGeom prst="rect">
             <a:avLst/>
@@ -3039,7 +3039,7 @@
           <a:ln/>
         </p:spPr>
         <p:txBody>
-          <a:bodyPr wrap="square" lIns="0" tIns="0" rIns="0" bIns="0" rtlCol="0" anchor="ctr"/>
+          <a:bodyPr wrap="square" lIns="0" tIns="0" rIns="0" bIns="0" rtlCol="0" anchor="b"/>
           <a:lstStyle/>
           <a:p>
             <a:pPr algn="r" indent="0" marL="0">
@@ -3054,7 +3054,75 @@
                 <a:ea typeface="Calibri" pitchFamily="34" charset="-122"/>
                 <a:cs typeface="Calibri" pitchFamily="34" charset="-120"/>
               </a:rPr>
-              <a:t>Nhóm: [Tên thành viên 1 – 4]</a:t>
+              <a:t>Nhóm 13</a:t>
+            </a:r>
+            <a:endParaRPr lang="en-US" sz="1600" dirty="0"/>
+          </a:p>
+          <a:p>
+            <a:pPr algn="r" indent="0" marL="0">
+              <a:buNone/>
+            </a:pPr>
+            <a:r>
+              <a:rPr lang="en-US" sz="1600" dirty="0">
+                <a:solidFill>
+                  <a:srgbClr val="B8C6D2"/>
+                </a:solidFill>
+                <a:latin typeface="Calibri" pitchFamily="34" charset="0"/>
+                <a:ea typeface="Calibri" pitchFamily="34" charset="-122"/>
+                <a:cs typeface="Calibri" pitchFamily="34" charset="-120"/>
+              </a:rPr>
+              <a:t>2312741 - Nguyễn Thanh Tâm</a:t>
+            </a:r>
+            <a:endParaRPr lang="en-US" sz="1600" dirty="0"/>
+          </a:p>
+          <a:p>
+            <a:pPr algn="r" indent="0" marL="0">
+              <a:buNone/>
+            </a:pPr>
+            <a:r>
+              <a:rPr lang="en-US" sz="1600" dirty="0">
+                <a:solidFill>
+                  <a:srgbClr val="B8C6D2"/>
+                </a:solidFill>
+                <a:latin typeface="Calibri" pitchFamily="34" charset="0"/>
+                <a:ea typeface="Calibri" pitchFamily="34" charset="-122"/>
+                <a:cs typeface="Calibri" pitchFamily="34" charset="-120"/>
+              </a:rPr>
+              <a:t>2312800 - Võ Công Vinh</a:t>
+            </a:r>
+            <a:endParaRPr lang="en-US" sz="1600" dirty="0"/>
+          </a:p>
+          <a:p>
+            <a:pPr algn="r" indent="0" marL="0">
+              <a:buNone/>
+            </a:pPr>
+            <a:r>
+              <a:rPr lang="en-US" sz="1600" dirty="0">
+                <a:solidFill>
+                  <a:srgbClr val="B8C6D2"/>
+                </a:solidFill>
+                <a:latin typeface="Calibri" pitchFamily="34" charset="0"/>
+                <a:ea typeface="Calibri" pitchFamily="34" charset="-122"/>
+                <a:cs typeface="Calibri" pitchFamily="34" charset="-120"/>
+              </a:rPr>
+              <a:t>2312774 - Nguyễn Đức Tín</a:t>
+            </a:r>
+            <a:endParaRPr lang="en-US" sz="1600" dirty="0"/>
+          </a:p>
+          <a:p>
+            <a:pPr algn="r" indent="0" marL="0">
+              <a:buNone/>
+            </a:pPr>
+            <a:r>
+              <a:rPr lang="en-US" sz="1600" dirty="0">
+                <a:solidFill>
+                  <a:srgbClr val="B8C6D2"/>
+                </a:solidFill>
+                <a:latin typeface="Calibri" pitchFamily="34" charset="0"/>
+                <a:ea typeface="Calibri" pitchFamily="34" charset="-122"/>
+                <a:cs typeface="Calibri" pitchFamily="34" charset="-120"/>
+              </a:rPr>
+              <a:t>2312796 - Ngô Quốc Trường Vĩ</a:t>
             </a:r>
             <a:endParaRPr lang="en-US" sz="1600" dirty="0"/>
           </a:p>

--- a/docs/THUYET_TRINH_R05-K15.pptx
+++ b/docs/THUYET_TRINH_R05-K15.pptx
@@ -121,19 +121,19 @@
   <p:extLst>
     <p:ext uri="{521415D9-36F7-43E2-AB2F-B90AF26B5E84}">
       <p14:sectionLst xmlns:p14="http://schemas.microsoft.com/office/powerpoint/2010/main">
-        <p14:section name="Đề tài và hệ thống" id="{9e4bd971-f0ea-3b7e-7617-1ddc98b44042}">
+        <p14:section name="Đề tài và hệ thống" id="{5c61b739-810b-e18b-e676-577029a90d67}">
           <p14:sldIdLst>
             <p14:sldId id="256"/>
             <p14:sldId id="257"/>
           </p14:sldIdLst>
         </p14:section>
-        <p14:section name="Kiến trúc và giả thuyết" id="{38338113-286d-0c8c-de36-5600e00ecd0d}">
+        <p14:section name="Kiến trúc và giả thuyết" id="{e99e2210-875f-2143-65c5-64f7868e1ee1}">
           <p14:sldIdLst>
             <p14:sldId id="258"/>
             <p14:sldId id="259"/>
           </p14:sldIdLst>
         </p14:section>
-        <p14:section name="Môi trường, phương pháp, harness" id="{0a62078f-89e4-402e-e4b5-9092244459af}">
+        <p14:section name="Môi trường, phương pháp, harness" id="{39508ca2-7113-0c85-1fbf-afd001084d32}">
           <p14:sldIdLst>
             <p14:sldId id="260"/>
             <p14:sldId id="261"/>
@@ -141,7 +141,7 @@
             <p14:sldId id="263"/>
           </p14:sldIdLst>
         </p14:section>
-        <p14:section name="Kết quả và lỗi" id="{b3c490d7-cd6c-6e0b-b90c-4be0964582d1}">
+        <p14:section name="Kết quả và lỗi" id="{6c809ae6-9b0e-19b7-9fa7-60b40efdbb20}">
           <p14:sldIdLst>
             <p14:sldId id="264"/>
             <p14:sldId id="265"/>
@@ -150,7 +150,7 @@
             <p14:sldId id="268"/>
           </p14:sldIdLst>
         </p14:section>
-        <p14:section name="Khắc phục và kết luận" id="{1ea3d39c-328d-c4c8-15a9-ba0766b8b49f}">
+        <p14:section name="Khắc phục và kết luận" id="{911441f6-51d9-7360-0a3c-8008fe3567f9}">
           <p14:sldIdLst>
             <p14:sldId id="269"/>
             <p14:sldId id="270"/>
@@ -3054,7 +3054,7 @@
                 <a:ea typeface="Calibri" pitchFamily="34" charset="-122"/>
                 <a:cs typeface="Calibri" pitchFamily="34" charset="-120"/>
               </a:rPr>
-              <a:t>Nhóm 13</a:t>
+              <a:t>Nhóm 14</a:t>
             </a:r>
             <a:endParaRPr lang="en-US" sz="1600" dirty="0"/>
           </a:p>
